--- a/dist/초6/영어/의사소통/초6_영어_의사소통_01_뜻확인하기_학생용.pptx
+++ b/dist/초6/영어/의사소통/초6_영어_의사소통_01_뜻확인하기_학생용.pptx
@@ -120,13 +120,13 @@
   <p:extLst>
     <p:ext uri="{521415D9-36F7-43E2-AB2F-B90AF26B5E84}">
       <p14:sectionLst xmlns:p14="http://schemas.microsoft.com/office/powerpoint/2010/main">
-        <p14:section name="도입" id="{edbf5072-7899-8a6b-57a4-eac3fbe22191}">
+        <p14:section name="도입" id="{8e7820e7-d2b2-e0c2-5ea5-b0ef32eab77d}">
           <p14:sldIdLst>
             <p14:sldId id="256"/>
             <p14:sldId id="257"/>
           </p14:sldIdLst>
         </p14:section>
-        <p14:section name="개념" id="{2de00ad2-1475-85d7-d18a-6b1d413e8255}">
+        <p14:section name="개념" id="{42f68dec-d521-796f-482e-0f0b6c2efdf3}">
           <p14:sldIdLst>
             <p14:sldId id="258"/>
             <p14:sldId id="259"/>
@@ -134,7 +134,7 @@
             <p14:sldId id="261"/>
           </p14:sldIdLst>
         </p14:section>
-        <p14:section name="연습" id="{6d06aeeb-21fc-99b6-79d8-3c6082de9fe9}">
+        <p14:section name="연습" id="{cbe65748-d8a8-8e86-67f3-b4d9e4d140ef}">
           <p14:sldIdLst>
             <p14:sldId id="262"/>
             <p14:sldId id="263"/>
@@ -142,18 +142,18 @@
             <p14:sldId id="265"/>
           </p14:sldIdLst>
         </p14:section>
-        <p14:section name="확인" id="{e07dc602-b7ae-a6b1-94ba-982428dc5a66}">
+        <p14:section name="확인" id="{87ebaeb8-7a66-44f1-8e2c-faee8faabca2}">
           <p14:sldIdLst>
             <p14:sldId id="266"/>
             <p14:sldId id="267"/>
           </p14:sldIdLst>
         </p14:section>
-        <p14:section name="정리" id="{78cb4f42-c9b8-96ab-44a1-69f73e338724}">
+        <p14:section name="정리" id="{b23a84d2-c910-a0c1-d589-6804c260e053}">
           <p14:sldIdLst>
             <p14:sldId id="268"/>
           </p14:sldIdLst>
         </p14:section>
-        <p14:section name="보충" id="{85e2e759-3fd9-f178-405a-a1a812979869}">
+        <p14:section name="보충" id="{4f05066a-a413-f041-6b7f-73edb0c5e4dd}">
           <p14:sldIdLst>
             <p14:sldId id="269"/>
           </p14:sldIdLst>

--- a/dist/초6/영어/의사소통/초6_영어_의사소통_01_뜻확인하기_학생용.pptx
+++ b/dist/초6/영어/의사소통/초6_영어_의사소통_01_뜻확인하기_학생용.pptx
@@ -120,13 +120,13 @@
   <p:extLst>
     <p:ext uri="{521415D9-36F7-43E2-AB2F-B90AF26B5E84}">
       <p14:sectionLst xmlns:p14="http://schemas.microsoft.com/office/powerpoint/2010/main">
-        <p14:section name="도입" id="{8e7820e7-d2b2-e0c2-5ea5-b0ef32eab77d}">
+        <p14:section name="도입" id="{78ded783-dbd3-a3a3-0b7a-9dd979b66215}">
           <p14:sldIdLst>
             <p14:sldId id="256"/>
             <p14:sldId id="257"/>
           </p14:sldIdLst>
         </p14:section>
-        <p14:section name="개념" id="{42f68dec-d521-796f-482e-0f0b6c2efdf3}">
+        <p14:section name="개념" id="{b2448b76-d77d-b340-fc5d-2e116ebce31f}">
           <p14:sldIdLst>
             <p14:sldId id="258"/>
             <p14:sldId id="259"/>
@@ -134,7 +134,7 @@
             <p14:sldId id="261"/>
           </p14:sldIdLst>
         </p14:section>
-        <p14:section name="연습" id="{cbe65748-d8a8-8e86-67f3-b4d9e4d140ef}">
+        <p14:section name="연습" id="{9a992bbe-3c7a-41e9-cd7f-b3d8428a93de}">
           <p14:sldIdLst>
             <p14:sldId id="262"/>
             <p14:sldId id="263"/>
@@ -142,18 +142,18 @@
             <p14:sldId id="265"/>
           </p14:sldIdLst>
         </p14:section>
-        <p14:section name="확인" id="{87ebaeb8-7a66-44f1-8e2c-faee8faabca2}">
+        <p14:section name="확인" id="{76bea648-9e53-d3f5-a0e7-98f4e7822a14}">
           <p14:sldIdLst>
             <p14:sldId id="266"/>
             <p14:sldId id="267"/>
           </p14:sldIdLst>
         </p14:section>
-        <p14:section name="정리" id="{b23a84d2-c910-a0c1-d589-6804c260e053}">
+        <p14:section name="정리" id="{1d10a048-4241-7a34-6254-f8db78192cd0}">
           <p14:sldIdLst>
             <p14:sldId id="268"/>
           </p14:sldIdLst>
         </p14:section>
-        <p14:section name="보충" id="{4f05066a-a413-f041-6b7f-73edb0c5e4dd}">
+        <p14:section name="보충" id="{57621d57-c267-b8fc-59f9-e40e9e3d5046}">
           <p14:sldIdLst>
             <p14:sldId id="269"/>
           </p14:sldIdLst>
